--- a/downloads/DCT_V1_Ch12_Slides.pptx
+++ b/downloads/DCT_V1_Ch12_Slides.pptx
@@ -129,7 +129,7 @@
   <p:extLst>
     <p:ext uri="{521415D9-36F7-43E2-AB2F-B90AF26B5E84}">
       <p14:sectionLst xmlns:p14="http://schemas.microsoft.com/office/powerpoint/2010/main">
-        <p14:section name="Opening" id="{c681bf75-189e-bebe-a8be-d5e5b2e8a06e}">
+        <p14:section name="Opening" id="{306a37d5-5371-ed39-7946-2f555f41d763}">
           <p14:sldIdLst>
             <p14:sldId id="256"/>
             <p14:sldId id="257"/>
@@ -137,49 +137,49 @@
             <p14:sldId id="259"/>
           </p14:sldIdLst>
         </p14:section>
-        <p14:section name="12.1 Why Risk Needs Four Words" id="{41c6cfcc-812c-dc50-ab0d-c655efcd6c6f}">
+        <p14:section name="12.1 Why Risk Needs Four Words" id="{0fcbe19d-1a06-9822-c754-0d32cb6fbd7c}">
           <p14:sldIdLst>
             <p14:sldId id="260"/>
           </p14:sldIdLst>
         </p14:section>
-        <p14:section name="12.2 Risk, Uncertainty, and the Architecture" id="{8beb2f5a-4319-eddc-e70a-574dead32284}">
+        <p14:section name="12.2 Risk, Uncertainty, and the Architecture" id="{0c74f7d8-fb76-5039-2ba5-8c4f09e54215}">
           <p14:sldIdLst>
             <p14:sldId id="261"/>
             <p14:sldId id="262"/>
           </p14:sldIdLst>
         </p14:section>
-        <p14:section name="12.3 Shocks, Stress, and Vulnerability" id="{27e48d1c-24c4-ee79-1e47-1d523e206621}">
+        <p14:section name="12.3 Shocks, Stress, and Vulnerability" id="{783322ea-c4de-9a7f-908b-11470ac1c690}">
           <p14:sldIdLst>
             <p14:sldId id="263"/>
           </p14:sldIdLst>
         </p14:section>
-        <p14:section name="12.4 Enterprise Robustness" id="{de59ddcf-b834-886d-843c-0e4062e7f552}">
+        <p14:section name="12.4 Enterprise Robustness" id="{2bd42e2c-15e8-6f7e-7f8c-db945f14f170}">
           <p14:sldIdLst>
             <p14:sldId id="264"/>
           </p14:sldIdLst>
         </p14:section>
-        <p14:section name="12.5 Enterprise Resilience and Recoverability" id="{90835795-ff9e-950f-ced4-592aae12806a}">
+        <p14:section name="12.5 Enterprise Resilience and Recoverability" id="{ad469511-48ce-c892-f70d-de91ebb157a5}">
           <p14:sldIdLst>
             <p14:sldId id="265"/>
           </p14:sldIdLst>
         </p14:section>
-        <p14:section name="12.6 Enterprise Survivability" id="{779425a2-f0f6-3ae1-5499-ae7d7f771b33}">
+        <p14:section name="12.6 Enterprise Survivability" id="{65ca486f-7ae1-c4ec-6edd-a917844fd5b6}">
           <p14:sldIdLst>
             <p14:sldId id="266"/>
           </p14:sldIdLst>
         </p14:section>
-        <p14:section name="12.7 Risk Propagation and Systemic Risk" id="{883bb94e-bc93-9e13-d6ba-8bd98d46af26}">
+        <p14:section name="12.7 Risk Propagation and Systemic Risk" id="{d2751f96-ce29-5fd8-188f-5376cd85d817}">
           <p14:sldIdLst>
             <p14:sldId id="267"/>
             <p14:sldId id="268"/>
           </p14:sldIdLst>
         </p14:section>
-        <p14:section name="12.8 The Risk Architecture Assembled" id="{01d8c89e-b9bb-7c1c-fdd9-68782ee3b421}">
+        <p14:section name="12.8 The Risk Architecture Assembled" id="{ff462c50-da63-53e6-7cba-5bae4a9bfa0e}">
           <p14:sldIdLst>
             <p14:sldId id="269"/>
           </p14:sldIdLst>
         </p14:section>
-        <p14:section name="Worked Example 12.1" id="{c4db4492-e27b-d3a4-9485-13f9d62c9893}">
+        <p14:section name="Worked Example 12.1" id="{aadfae8d-1ede-3f5b-9906-089784d7de6d}">
           <p14:sldIdLst>
             <p14:sldId id="270"/>
             <p14:sldId id="271"/>
@@ -188,12 +188,12 @@
             <p14:sldId id="274"/>
           </p14:sldIdLst>
         </p14:section>
-        <p14:section name="AXIOM Lab 1.12" id="{6c5ccf96-a3c8-f1f4-aed2-65a302e8f8ab}">
+        <p14:section name="AXIOM Lab 1.12" id="{c9e03d47-72dc-6987-a79d-ca3fb5875f6a}">
           <p14:sldIdLst>
             <p14:sldId id="275"/>
           </p14:sldIdLst>
         </p14:section>
-        <p14:section name="Close" id="{7f231ff8-ed07-95d3-0be1-abe52e1dcf48}">
+        <p14:section name="Close" id="{c3eb6ca2-12e9-49ad-829f-9a21751a05f5}">
           <p14:sldIdLst>
             <p14:sldId id="276"/>
             <p14:sldId id="277"/>
@@ -14181,23 +14181,7 @@
                   <a:schemeClr val="tx1"/>
                 </a:solidFill>
               </a:rPr>
-              <a:t>Resilience is two numbers. Recovery clocks grow with the logarithm of the shock and explode as the rate slows; stress moves the equilibrium; recovery is to the band, never the point; and the next shock may arrive first, with odds 1 − e</a:t>
-            </a:r>
-            <a:r>
-              <a:rPr lang="en-US" sz="1500" baseline="30000" dirty="0">
-                <a:solidFill>
-                  <a:schemeClr val="tx1"/>
-                </a:solidFill>
-              </a:rPr>
-              <a:t>−λT_rec</a:t>
-            </a:r>
-            <a:r>
-              <a:rPr lang="en-US" sz="1500" dirty="0">
-                <a:solidFill>
-                  <a:schemeClr val="tx1"/>
-                </a:solidFill>
-              </a:rPr>
-              <a:t>.</a:t>
+              <a:t>Resilience is two numbers. Recovery clocks grow with the logarithm of the shock and explode as the rate slows; stress moves the equilibrium; recovery is to the band, never the point; and the next shock may arrive first, with odds 1 - e^(-λ T_rec).</a:t>
             </a:r>
             <a:endParaRPr lang="en-US" sz="1500" dirty="0"/>
           </a:p>
@@ -14297,23 +14281,7 @@
                   <a:schemeClr val="tx1"/>
                 </a:solidFill>
               </a:rPr>
-              <a:t>Containment is an eigenvalue: cascades die out when ρ(G) &lt; 1, the total bill is the multiplier (I − G)</a:t>
-            </a:r>
-            <a:r>
-              <a:rPr lang="en-US" sz="1500" baseline="30000" dirty="0">
-                <a:solidFill>
-                  <a:schemeClr val="tx1"/>
-                </a:solidFill>
-              </a:rPr>
-              <a:t>−1</a:t>
-            </a:r>
-            <a:r>
-              <a:rPr lang="en-US" sz="1500" dirty="0">
-                <a:solidFill>
-                  <a:schemeClr val="tx1"/>
-                </a:solidFill>
-              </a:rPr>
-              <a:t>, and registers of separate risks omit both the cascade terms and the common causes.</a:t>
+              <a:t>Containment is an eigenvalue: cascades die out when ρ(G) &lt; 1, the total bill is the multiplier (I - G)⁻¹, and registers of separate risks omit both the cascade terms and the common causes.</a:t>
             </a:r>
             <a:endParaRPr lang="en-US" sz="1500" dirty="0"/>
           </a:p>

--- a/downloads/DCT_V1_Ch12_Slides.pptx
+++ b/downloads/DCT_V1_Ch12_Slides.pptx
@@ -129,7 +129,7 @@
   <p:extLst>
     <p:ext uri="{521415D9-36F7-43E2-AB2F-B90AF26B5E84}">
       <p14:sectionLst xmlns:p14="http://schemas.microsoft.com/office/powerpoint/2010/main">
-        <p14:section name="Opening" id="{306a37d5-5371-ed39-7946-2f555f41d763}">
+        <p14:section name="Opening" id="{2bd07450-7c6f-6066-0039-e0cf80512817}">
           <p14:sldIdLst>
             <p14:sldId id="256"/>
             <p14:sldId id="257"/>
@@ -137,49 +137,49 @@
             <p14:sldId id="259"/>
           </p14:sldIdLst>
         </p14:section>
-        <p14:section name="12.1 Why Risk Needs Four Words" id="{0fcbe19d-1a06-9822-c754-0d32cb6fbd7c}">
+        <p14:section name="12.1 Why Risk Needs Four Words" id="{35f8b42d-e685-6a8c-d6ac-4593efc5d2c7}">
           <p14:sldIdLst>
             <p14:sldId id="260"/>
           </p14:sldIdLst>
         </p14:section>
-        <p14:section name="12.2 Risk, Uncertainty, and the Architecture" id="{0c74f7d8-fb76-5039-2ba5-8c4f09e54215}">
+        <p14:section name="12.2 Risk, Uncertainty, and the Architecture" id="{ddd30c90-df93-d368-42bc-6ec4f7fe39c3}">
           <p14:sldIdLst>
             <p14:sldId id="261"/>
             <p14:sldId id="262"/>
           </p14:sldIdLst>
         </p14:section>
-        <p14:section name="12.3 Shocks, Stress, and Vulnerability" id="{783322ea-c4de-9a7f-908b-11470ac1c690}">
+        <p14:section name="12.3 Shocks, Stress, and Vulnerability" id="{c76a6525-d31c-2a76-a654-7db7f828528f}">
           <p14:sldIdLst>
             <p14:sldId id="263"/>
           </p14:sldIdLst>
         </p14:section>
-        <p14:section name="12.4 Enterprise Robustness" id="{2bd42e2c-15e8-6f7e-7f8c-db945f14f170}">
+        <p14:section name="12.4 Enterprise Robustness" id="{3602f6a2-ccac-737d-6e5b-d6537f59bac8}">
           <p14:sldIdLst>
             <p14:sldId id="264"/>
           </p14:sldIdLst>
         </p14:section>
-        <p14:section name="12.5 Enterprise Resilience and Recoverability" id="{ad469511-48ce-c892-f70d-de91ebb157a5}">
+        <p14:section name="12.5 Enterprise Resilience and Recoverability" id="{97692dec-4bfc-5517-bcce-243c8fd3caa6}">
           <p14:sldIdLst>
             <p14:sldId id="265"/>
           </p14:sldIdLst>
         </p14:section>
-        <p14:section name="12.6 Enterprise Survivability" id="{65ca486f-7ae1-c4ec-6edd-a917844fd5b6}">
+        <p14:section name="12.6 Enterprise Survivability" id="{3bd7896e-07c6-c942-9ab9-4d9d0e87ccec}">
           <p14:sldIdLst>
             <p14:sldId id="266"/>
           </p14:sldIdLst>
         </p14:section>
-        <p14:section name="12.7 Risk Propagation and Systemic Risk" id="{d2751f96-ce29-5fd8-188f-5376cd85d817}">
+        <p14:section name="12.7 Risk Propagation and Systemic Risk" id="{5627b128-07cd-74b7-e0ae-59ef4ddd2b31}">
           <p14:sldIdLst>
             <p14:sldId id="267"/>
             <p14:sldId id="268"/>
           </p14:sldIdLst>
         </p14:section>
-        <p14:section name="12.8 The Risk Architecture Assembled" id="{ff462c50-da63-53e6-7cba-5bae4a9bfa0e}">
+        <p14:section name="12.8 The Risk Architecture Assembled" id="{af6831d6-819f-192a-5473-ad1e6f882bbd}">
           <p14:sldIdLst>
             <p14:sldId id="269"/>
           </p14:sldIdLst>
         </p14:section>
-        <p14:section name="Worked Example 12.1" id="{aadfae8d-1ede-3f5b-9906-089784d7de6d}">
+        <p14:section name="Worked Example 12.1" id="{5e361cdb-8db7-b70a-130e-4503ad13de4e}">
           <p14:sldIdLst>
             <p14:sldId id="270"/>
             <p14:sldId id="271"/>
@@ -188,12 +188,12 @@
             <p14:sldId id="274"/>
           </p14:sldIdLst>
         </p14:section>
-        <p14:section name="AXIOM Lab 1.12" id="{c9e03d47-72dc-6987-a79d-ca3fb5875f6a}">
+        <p14:section name="AXIOM Lab 1.12" id="{569bf526-1def-7372-a286-501dba3b0e45}">
           <p14:sldIdLst>
             <p14:sldId id="275"/>
           </p14:sldIdLst>
         </p14:section>
-        <p14:section name="Close" id="{c3eb6ca2-12e9-49ad-829f-9a21751a05f5}">
+        <p14:section name="Close" id="{6e00295d-6748-ba73-af6c-12b85aed94e7}">
           <p14:sldIdLst>
             <p14:sldId id="276"/>
             <p14:sldId id="277"/>
